--- a/figures/resources/stitching.pptx
+++ b/figures/resources/stitching.pptx
@@ -262,7 +262,7 @@
           <a:p>
             <a:fld id="{B7756873-501F-A744-AAAE-0CDF6C6A3E0B}" type="datetimeFigureOut">
               <a:rPr lang="en-DE" smtClean="0"/>
-              <a:t>04/22/2026</a:t>
+              <a:t>23.04.26</a:t>
             </a:fld>
             <a:endParaRPr lang="en-DE"/>
           </a:p>
@@ -462,7 +462,7 @@
           <a:p>
             <a:fld id="{B7756873-501F-A744-AAAE-0CDF6C6A3E0B}" type="datetimeFigureOut">
               <a:rPr lang="en-DE" smtClean="0"/>
-              <a:t>04/22/2026</a:t>
+              <a:t>23.04.26</a:t>
             </a:fld>
             <a:endParaRPr lang="en-DE"/>
           </a:p>
@@ -672,7 +672,7 @@
           <a:p>
             <a:fld id="{B7756873-501F-A744-AAAE-0CDF6C6A3E0B}" type="datetimeFigureOut">
               <a:rPr lang="en-DE" smtClean="0"/>
-              <a:t>04/22/2026</a:t>
+              <a:t>23.04.26</a:t>
             </a:fld>
             <a:endParaRPr lang="en-DE"/>
           </a:p>
@@ -872,7 +872,7 @@
           <a:p>
             <a:fld id="{B7756873-501F-A744-AAAE-0CDF6C6A3E0B}" type="datetimeFigureOut">
               <a:rPr lang="en-DE" smtClean="0"/>
-              <a:t>04/22/2026</a:t>
+              <a:t>23.04.26</a:t>
             </a:fld>
             <a:endParaRPr lang="en-DE"/>
           </a:p>
@@ -1148,7 +1148,7 @@
           <a:p>
             <a:fld id="{B7756873-501F-A744-AAAE-0CDF6C6A3E0B}" type="datetimeFigureOut">
               <a:rPr lang="en-DE" smtClean="0"/>
-              <a:t>04/22/2026</a:t>
+              <a:t>23.04.26</a:t>
             </a:fld>
             <a:endParaRPr lang="en-DE"/>
           </a:p>
@@ -1416,7 +1416,7 @@
           <a:p>
             <a:fld id="{B7756873-501F-A744-AAAE-0CDF6C6A3E0B}" type="datetimeFigureOut">
               <a:rPr lang="en-DE" smtClean="0"/>
-              <a:t>04/22/2026</a:t>
+              <a:t>23.04.26</a:t>
             </a:fld>
             <a:endParaRPr lang="en-DE"/>
           </a:p>
@@ -1831,7 +1831,7 @@
           <a:p>
             <a:fld id="{B7756873-501F-A744-AAAE-0CDF6C6A3E0B}" type="datetimeFigureOut">
               <a:rPr lang="en-DE" smtClean="0"/>
-              <a:t>04/22/2026</a:t>
+              <a:t>23.04.26</a:t>
             </a:fld>
             <a:endParaRPr lang="en-DE"/>
           </a:p>
@@ -1973,7 +1973,7 @@
           <a:p>
             <a:fld id="{B7756873-501F-A744-AAAE-0CDF6C6A3E0B}" type="datetimeFigureOut">
               <a:rPr lang="en-DE" smtClean="0"/>
-              <a:t>04/22/2026</a:t>
+              <a:t>23.04.26</a:t>
             </a:fld>
             <a:endParaRPr lang="en-DE"/>
           </a:p>
@@ -2086,7 +2086,7 @@
           <a:p>
             <a:fld id="{B7756873-501F-A744-AAAE-0CDF6C6A3E0B}" type="datetimeFigureOut">
               <a:rPr lang="en-DE" smtClean="0"/>
-              <a:t>04/22/2026</a:t>
+              <a:t>23.04.26</a:t>
             </a:fld>
             <a:endParaRPr lang="en-DE"/>
           </a:p>
@@ -2399,7 +2399,7 @@
           <a:p>
             <a:fld id="{B7756873-501F-A744-AAAE-0CDF6C6A3E0B}" type="datetimeFigureOut">
               <a:rPr lang="en-DE" smtClean="0"/>
-              <a:t>04/22/2026</a:t>
+              <a:t>23.04.26</a:t>
             </a:fld>
             <a:endParaRPr lang="en-DE"/>
           </a:p>
@@ -2688,7 +2688,7 @@
           <a:p>
             <a:fld id="{B7756873-501F-A744-AAAE-0CDF6C6A3E0B}" type="datetimeFigureOut">
               <a:rPr lang="en-DE" smtClean="0"/>
-              <a:t>04/22/2026</a:t>
+              <a:t>23.04.26</a:t>
             </a:fld>
             <a:endParaRPr lang="en-DE"/>
           </a:p>
@@ -2931,7 +2931,7 @@
           <a:p>
             <a:fld id="{B7756873-501F-A744-AAAE-0CDF6C6A3E0B}" type="datetimeFigureOut">
               <a:rPr lang="en-DE" smtClean="0"/>
-              <a:t>04/22/2026</a:t>
+              <a:t>23.04.26</a:t>
             </a:fld>
             <a:endParaRPr lang="en-DE"/>
           </a:p>
@@ -3421,7 +3421,7 @@
         </p:nvSpPr>
         <p:spPr>
           <a:xfrm rot="10800000" flipH="1">
-            <a:off x="2384347" y="2102357"/>
+            <a:off x="2384347" y="2260007"/>
             <a:ext cx="8373881" cy="3833844"/>
           </a:xfrm>
           <a:prstGeom prst="uturnArrow">
@@ -3801,7 +3801,7 @@
         </p:nvSpPr>
         <p:spPr>
           <a:xfrm>
-            <a:off x="2020316" y="3581773"/>
+            <a:off x="2745525" y="3287484"/>
             <a:ext cx="2035629" cy="369332"/>
           </a:xfrm>
           <a:prstGeom prst="rect">
@@ -3858,7 +3858,7 @@
             <a:pPr algn="ctr"/>
             <a:r>
               <a:rPr lang="en-US" dirty="0"/>
-              <a:t>If required flat-field correction</a:t>
+              <a:t>if required flat-field correction</a:t>
             </a:r>
           </a:p>
         </p:txBody>
@@ -3989,8 +3989,8 @@
         </p:nvSpPr>
         <p:spPr>
           <a:xfrm>
-            <a:off x="7772024" y="2977017"/>
-            <a:ext cx="2035629" cy="369332"/>
+            <a:off x="6402477" y="3003100"/>
+            <a:ext cx="3498269" cy="369332"/>
           </a:xfrm>
           <a:prstGeom prst="rect">
             <a:avLst/>
@@ -4008,7 +4008,7 @@
             <a:pPr algn="ctr"/>
             <a:r>
               <a:rPr lang="en-US" dirty="0"/>
-              <a:t>Blending/fusion</a:t>
+              <a:t>Blending (e.g. using projections)</a:t>
             </a:r>
           </a:p>
         </p:txBody>
